--- a/slides/career/winning-people-over.pptx
+++ b/slides/career/winning-people-over.pptx
@@ -4867,7 +4867,40 @@
       <p:grpSpPr/>
       <p:sp>
         <p:nvSpPr>
-          <p:cNvPr id="2" name="TextBox 1" descr="Course label"/>
+          <p:cNvPr id="2" name="Title 1" descr="Slide title: Winning People Over"/>
+          <p:cNvSpPr>
+            <a:spLocks noGrp="1"/>
+          </p:cNvSpPr>
+          <p:nvPr>
+            <p:ph type="title"/>
+          </p:nvPr>
+        </p:nvSpPr>
+        <p:spPr>
+          <a:xfrm>
+            <a:off x="822960" y="1920240"/>
+            <a:ext cx="10515600" cy="1737360"/>
+          </a:xfrm>
+        </p:spPr>
+        <p:txBody>
+          <a:bodyPr wrap="square"/>
+          <a:lstStyle/>
+          <a:p>
+            <a:pPr algn="l"/>
+            <a:r>
+              <a:rPr sz="4800" b="1">
+                <a:solidFill>
+                  <a:srgbClr val="FFFFFF"/>
+                </a:solidFill>
+                <a:latin typeface="Cambria"/>
+              </a:rPr>
+              <a:t>Winning People Over</a:t>
+            </a:r>
+          </a:p>
+        </p:txBody>
+      </p:sp>
+      <p:sp>
+        <p:nvSpPr>
+          <p:cNvPr id="3" name="TextBox 2" descr="Course label"/>
           <p:cNvSpPr txBox="1"/>
           <p:nvPr/>
         </p:nvSpPr>
@@ -4900,40 +4933,6 @@
                 <a:latin typeface="Calibri"/>
               </a:rPr>
               <a:t>INSTRUCTOR’S CAREER SERIES</a:t>
-            </a:r>
-          </a:p>
-        </p:txBody>
-      </p:sp>
-      <p:sp>
-        <p:nvSpPr>
-          <p:cNvPr id="3" name="TextBox 2" descr="Slide title: Winning People Over"/>
-          <p:cNvSpPr txBox="1"/>
-          <p:nvPr/>
-        </p:nvSpPr>
-        <p:spPr>
-          <a:xfrm>
-            <a:off x="822960" y="1920240"/>
-            <a:ext cx="10515600" cy="1737360"/>
-          </a:xfrm>
-          <a:prstGeom prst="rect">
-            <a:avLst/>
-          </a:prstGeom>
-          <a:noFill/>
-        </p:spPr>
-        <p:txBody>
-          <a:bodyPr wrap="square">
-            <a:spAutoFit/>
-          </a:bodyPr>
-          <a:lstStyle/>
-          <a:p>
-            <a:r>
-              <a:rPr sz="4800" b="1">
-                <a:solidFill>
-                  <a:srgbClr val="FFFFFF"/>
-                </a:solidFill>
-                <a:latin typeface="Cambria"/>
-              </a:rPr>
-              <a:t>Winning People Over</a:t>
             </a:r>
           </a:p>
         </p:txBody>
@@ -5044,26 +5043,25 @@
       <p:grpSpPr/>
       <p:sp>
         <p:nvSpPr>
-          <p:cNvPr id="2" name="TextBox 1" descr="Slide title: Listening is the most underrated influence tool"/>
-          <p:cNvSpPr txBox="1"/>
-          <p:nvPr/>
+          <p:cNvPr id="2" name="Title 1" descr="Slide title: Listening is the most underrated influence tool"/>
+          <p:cNvSpPr>
+            <a:spLocks noGrp="1"/>
+          </p:cNvSpPr>
+          <p:nvPr>
+            <p:ph type="title"/>
+          </p:nvPr>
         </p:nvSpPr>
         <p:spPr>
           <a:xfrm>
             <a:off x="502920" y="411480"/>
             <a:ext cx="11155680" cy="914400"/>
           </a:xfrm>
-          <a:prstGeom prst="rect">
-            <a:avLst/>
-          </a:prstGeom>
-          <a:noFill/>
-        </p:spPr>
-        <p:txBody>
-          <a:bodyPr wrap="square">
-            <a:spAutoFit/>
-          </a:bodyPr>
-          <a:lstStyle/>
-          <a:p>
+        </p:spPr>
+        <p:txBody>
+          <a:bodyPr wrap="square"/>
+          <a:lstStyle/>
+          <a:p>
+            <a:pPr algn="l"/>
             <a:r>
               <a:rPr sz="3200" b="1">
                 <a:solidFill>
@@ -5175,7 +5173,7 @@
             <a:r>
               <a:rPr sz="1700">
                 <a:solidFill>
-                  <a:srgbClr val="C9931A"/>
+                  <a:srgbClr val="8A6410"/>
                 </a:solidFill>
                 <a:latin typeface="Calibri"/>
               </a:rPr>
@@ -5209,7 +5207,7 @@
             <a:r>
               <a:rPr sz="1700">
                 <a:solidFill>
-                  <a:srgbClr val="C9931A"/>
+                  <a:srgbClr val="8A6410"/>
                 </a:solidFill>
                 <a:latin typeface="Calibri"/>
               </a:rPr>
@@ -5243,7 +5241,7 @@
             <a:r>
               <a:rPr sz="1700">
                 <a:solidFill>
-                  <a:srgbClr val="C9931A"/>
+                  <a:srgbClr val="8A6410"/>
                 </a:solidFill>
                 <a:latin typeface="Calibri"/>
               </a:rPr>
@@ -5277,7 +5275,7 @@
             <a:r>
               <a:rPr sz="1700">
                 <a:solidFill>
-                  <a:srgbClr val="C9931A"/>
+                  <a:srgbClr val="8A6410"/>
                 </a:solidFill>
                 <a:latin typeface="Calibri"/>
               </a:rPr>
@@ -5332,7 +5330,40 @@
       <p:grpSpPr/>
       <p:sp>
         <p:nvSpPr>
-          <p:cNvPr id="2" name="TextBox 1" descr="Section number 03"/>
+          <p:cNvPr id="2" name="Title 1" descr="Slide title: Winning agreement"/>
+          <p:cNvSpPr>
+            <a:spLocks noGrp="1"/>
+          </p:cNvSpPr>
+          <p:nvPr>
+            <p:ph type="title"/>
+          </p:nvPr>
+        </p:nvSpPr>
+        <p:spPr>
+          <a:xfrm>
+            <a:off x="822960" y="2834640"/>
+            <a:ext cx="10515600" cy="914400"/>
+          </a:xfrm>
+        </p:spPr>
+        <p:txBody>
+          <a:bodyPr wrap="square"/>
+          <a:lstStyle/>
+          <a:p>
+            <a:pPr algn="l"/>
+            <a:r>
+              <a:rPr sz="4000" b="1">
+                <a:solidFill>
+                  <a:srgbClr val="FFFFFF"/>
+                </a:solidFill>
+                <a:latin typeface="Cambria"/>
+              </a:rPr>
+              <a:t>Winning agreement</a:t>
+            </a:r>
+          </a:p>
+        </p:txBody>
+      </p:sp>
+      <p:sp>
+        <p:nvSpPr>
+          <p:cNvPr id="3" name="TextBox 2" descr="Section number 03"/>
           <p:cNvSpPr txBox="1"/>
           <p:nvPr/>
         </p:nvSpPr>
@@ -5365,40 +5396,6 @@
                 <a:latin typeface="Cambria"/>
               </a:rPr>
               <a:t>03</a:t>
-            </a:r>
-          </a:p>
-        </p:txBody>
-      </p:sp>
-      <p:sp>
-        <p:nvSpPr>
-          <p:cNvPr id="3" name="TextBox 2" descr="Slide title: Winning agreement"/>
-          <p:cNvSpPr txBox="1"/>
-          <p:nvPr/>
-        </p:nvSpPr>
-        <p:spPr>
-          <a:xfrm>
-            <a:off x="822960" y="2834640"/>
-            <a:ext cx="10515600" cy="914400"/>
-          </a:xfrm>
-          <a:prstGeom prst="rect">
-            <a:avLst/>
-          </a:prstGeom>
-          <a:noFill/>
-        </p:spPr>
-        <p:txBody>
-          <a:bodyPr wrap="square">
-            <a:spAutoFit/>
-          </a:bodyPr>
-          <a:lstStyle/>
-          <a:p>
-            <a:r>
-              <a:rPr sz="4000" b="1">
-                <a:solidFill>
-                  <a:srgbClr val="FFFFFF"/>
-                </a:solidFill>
-                <a:latin typeface="Cambria"/>
-              </a:rPr>
-              <a:t>Winning agreement</a:t>
             </a:r>
           </a:p>
         </p:txBody>
@@ -5539,26 +5536,25 @@
       <p:grpSpPr/>
       <p:sp>
         <p:nvSpPr>
-          <p:cNvPr id="2" name="TextBox 1" descr="Slide title: The argument paradox"/>
-          <p:cNvSpPr txBox="1"/>
-          <p:nvPr/>
+          <p:cNvPr id="2" name="Title 1" descr="Slide title: The argument paradox"/>
+          <p:cNvSpPr>
+            <a:spLocks noGrp="1"/>
+          </p:cNvSpPr>
+          <p:nvPr>
+            <p:ph type="title"/>
+          </p:nvPr>
         </p:nvSpPr>
         <p:spPr>
           <a:xfrm>
             <a:off x="502920" y="411480"/>
             <a:ext cx="11155680" cy="914400"/>
           </a:xfrm>
-          <a:prstGeom prst="rect">
-            <a:avLst/>
-          </a:prstGeom>
-          <a:noFill/>
-        </p:spPr>
-        <p:txBody>
-          <a:bodyPr wrap="square">
-            <a:spAutoFit/>
-          </a:bodyPr>
-          <a:lstStyle/>
-          <a:p>
+        </p:spPr>
+        <p:txBody>
+          <a:bodyPr wrap="square"/>
+          <a:lstStyle/>
+          <a:p>
+            <a:pPr algn="l"/>
             <a:r>
               <a:rPr sz="3200" b="1">
                 <a:solidFill>
@@ -5743,7 +5739,7 @@
             <a:r>
               <a:rPr sz="1600">
                 <a:solidFill>
-                  <a:srgbClr val="C9931A"/>
+                  <a:srgbClr val="8A6410"/>
                 </a:solidFill>
                 <a:latin typeface="Calibri"/>
               </a:rPr>
@@ -5777,7 +5773,7 @@
             <a:r>
               <a:rPr sz="1600">
                 <a:solidFill>
-                  <a:srgbClr val="C9931A"/>
+                  <a:srgbClr val="8A6410"/>
                 </a:solidFill>
                 <a:latin typeface="Calibri"/>
               </a:rPr>
@@ -5811,7 +5807,7 @@
             <a:r>
               <a:rPr sz="1600">
                 <a:solidFill>
-                  <a:srgbClr val="C9931A"/>
+                  <a:srgbClr val="8A6410"/>
                 </a:solidFill>
                 <a:latin typeface="Calibri"/>
               </a:rPr>
@@ -5866,26 +5862,25 @@
       <p:grpSpPr/>
       <p:sp>
         <p:nvSpPr>
-          <p:cNvPr id="2" name="TextBox 1" descr="Slide title: Build a path to yes"/>
-          <p:cNvSpPr txBox="1"/>
-          <p:nvPr/>
+          <p:cNvPr id="2" name="Title 1" descr="Slide title: Build a path to yes"/>
+          <p:cNvSpPr>
+            <a:spLocks noGrp="1"/>
+          </p:cNvSpPr>
+          <p:nvPr>
+            <p:ph type="title"/>
+          </p:nvPr>
         </p:nvSpPr>
         <p:spPr>
           <a:xfrm>
             <a:off x="502920" y="411480"/>
             <a:ext cx="11155680" cy="914400"/>
           </a:xfrm>
-          <a:prstGeom prst="rect">
-            <a:avLst/>
-          </a:prstGeom>
-          <a:noFill/>
-        </p:spPr>
-        <p:txBody>
-          <a:bodyPr wrap="square">
-            <a:spAutoFit/>
-          </a:bodyPr>
-          <a:lstStyle/>
-          <a:p>
+        </p:spPr>
+        <p:txBody>
+          <a:bodyPr wrap="square"/>
+          <a:lstStyle/>
+          <a:p>
+            <a:pPr algn="l"/>
             <a:r>
               <a:rPr sz="3200" b="1">
                 <a:solidFill>
@@ -5997,7 +5992,7 @@
             <a:r>
               <a:rPr sz="1700">
                 <a:solidFill>
-                  <a:srgbClr val="C9931A"/>
+                  <a:srgbClr val="8A6410"/>
                 </a:solidFill>
                 <a:latin typeface="Calibri"/>
               </a:rPr>
@@ -6031,7 +6026,7 @@
             <a:r>
               <a:rPr sz="1700">
                 <a:solidFill>
-                  <a:srgbClr val="C9931A"/>
+                  <a:srgbClr val="8A6410"/>
                 </a:solidFill>
                 <a:latin typeface="Calibri"/>
               </a:rPr>
@@ -6065,7 +6060,7 @@
             <a:r>
               <a:rPr sz="1700">
                 <a:solidFill>
-                  <a:srgbClr val="C9931A"/>
+                  <a:srgbClr val="8A6410"/>
                 </a:solidFill>
                 <a:latin typeface="Calibri"/>
               </a:rPr>
@@ -6099,7 +6094,7 @@
             <a:r>
               <a:rPr sz="1700">
                 <a:solidFill>
-                  <a:srgbClr val="C9931A"/>
+                  <a:srgbClr val="8A6410"/>
                 </a:solidFill>
                 <a:latin typeface="Calibri"/>
               </a:rPr>
@@ -6133,7 +6128,7 @@
             <a:r>
               <a:rPr sz="1700">
                 <a:solidFill>
-                  <a:srgbClr val="C9931A"/>
+                  <a:srgbClr val="8A6410"/>
                 </a:solidFill>
                 <a:latin typeface="Calibri"/>
               </a:rPr>
@@ -6188,7 +6183,40 @@
       <p:grpSpPr/>
       <p:sp>
         <p:nvSpPr>
-          <p:cNvPr id="2" name="TextBox 1" descr="Section number 04"/>
+          <p:cNvPr id="2" name="Title 1" descr="Slide title: Leading without resentment"/>
+          <p:cNvSpPr>
+            <a:spLocks noGrp="1"/>
+          </p:cNvSpPr>
+          <p:nvPr>
+            <p:ph type="title"/>
+          </p:nvPr>
+        </p:nvSpPr>
+        <p:spPr>
+          <a:xfrm>
+            <a:off x="822960" y="2834640"/>
+            <a:ext cx="10515600" cy="914400"/>
+          </a:xfrm>
+        </p:spPr>
+        <p:txBody>
+          <a:bodyPr wrap="square"/>
+          <a:lstStyle/>
+          <a:p>
+            <a:pPr algn="l"/>
+            <a:r>
+              <a:rPr sz="4000" b="1">
+                <a:solidFill>
+                  <a:srgbClr val="FFFFFF"/>
+                </a:solidFill>
+                <a:latin typeface="Cambria"/>
+              </a:rPr>
+              <a:t>Leading without resentment</a:t>
+            </a:r>
+          </a:p>
+        </p:txBody>
+      </p:sp>
+      <p:sp>
+        <p:nvSpPr>
+          <p:cNvPr id="3" name="TextBox 2" descr="Section number 04"/>
           <p:cNvSpPr txBox="1"/>
           <p:nvPr/>
         </p:nvSpPr>
@@ -6221,40 +6249,6 @@
                 <a:latin typeface="Cambria"/>
               </a:rPr>
               <a:t>04</a:t>
-            </a:r>
-          </a:p>
-        </p:txBody>
-      </p:sp>
-      <p:sp>
-        <p:nvSpPr>
-          <p:cNvPr id="3" name="TextBox 2" descr="Slide title: Leading without resentment"/>
-          <p:cNvSpPr txBox="1"/>
-          <p:nvPr/>
-        </p:nvSpPr>
-        <p:spPr>
-          <a:xfrm>
-            <a:off x="822960" y="2834640"/>
-            <a:ext cx="10515600" cy="914400"/>
-          </a:xfrm>
-          <a:prstGeom prst="rect">
-            <a:avLst/>
-          </a:prstGeom>
-          <a:noFill/>
-        </p:spPr>
-        <p:txBody>
-          <a:bodyPr wrap="square">
-            <a:spAutoFit/>
-          </a:bodyPr>
-          <a:lstStyle/>
-          <a:p>
-            <a:r>
-              <a:rPr sz="4000" b="1">
-                <a:solidFill>
-                  <a:srgbClr val="FFFFFF"/>
-                </a:solidFill>
-                <a:latin typeface="Cambria"/>
-              </a:rPr>
-              <a:t>Leading without resentment</a:t>
             </a:r>
           </a:p>
         </p:txBody>
@@ -6395,26 +6389,25 @@
       <p:grpSpPr/>
       <p:sp>
         <p:nvSpPr>
-          <p:cNvPr id="2" name="TextBox 1" descr="Slide title: Changing behavior without making an enemy"/>
-          <p:cNvSpPr txBox="1"/>
-          <p:nvPr/>
+          <p:cNvPr id="2" name="Title 1" descr="Slide title: Changing behavior without making an enemy"/>
+          <p:cNvSpPr>
+            <a:spLocks noGrp="1"/>
+          </p:cNvSpPr>
+          <p:nvPr>
+            <p:ph type="title"/>
+          </p:nvPr>
         </p:nvSpPr>
         <p:spPr>
           <a:xfrm>
             <a:off x="502920" y="411480"/>
             <a:ext cx="11155680" cy="914400"/>
           </a:xfrm>
-          <a:prstGeom prst="rect">
-            <a:avLst/>
-          </a:prstGeom>
-          <a:noFill/>
-        </p:spPr>
-        <p:txBody>
-          <a:bodyPr wrap="square">
-            <a:spAutoFit/>
-          </a:bodyPr>
-          <a:lstStyle/>
-          <a:p>
+        </p:spPr>
+        <p:txBody>
+          <a:bodyPr wrap="square"/>
+          <a:lstStyle/>
+          <a:p>
+            <a:pPr algn="l"/>
             <a:r>
               <a:rPr sz="3200" b="1">
                 <a:solidFill>
@@ -7064,26 +7057,25 @@
       <p:grpSpPr/>
       <p:sp>
         <p:nvSpPr>
-          <p:cNvPr id="2" name="TextBox 1" descr="Slide title: Praise progress — loudly, specifically, publicly"/>
-          <p:cNvSpPr txBox="1"/>
-          <p:nvPr/>
+          <p:cNvPr id="2" name="Title 1" descr="Slide title: Praise progress — loudly, specifically, publicly"/>
+          <p:cNvSpPr>
+            <a:spLocks noGrp="1"/>
+          </p:cNvSpPr>
+          <p:nvPr>
+            <p:ph type="title"/>
+          </p:nvPr>
         </p:nvSpPr>
         <p:spPr>
           <a:xfrm>
             <a:off x="502920" y="411480"/>
             <a:ext cx="11155680" cy="914400"/>
           </a:xfrm>
-          <a:prstGeom prst="rect">
-            <a:avLst/>
-          </a:prstGeom>
-          <a:noFill/>
-        </p:spPr>
-        <p:txBody>
-          <a:bodyPr wrap="square">
-            <a:spAutoFit/>
-          </a:bodyPr>
-          <a:lstStyle/>
-          <a:p>
+        </p:spPr>
+        <p:txBody>
+          <a:bodyPr wrap="square"/>
+          <a:lstStyle/>
+          <a:p>
+            <a:pPr algn="l"/>
             <a:r>
               <a:rPr sz="3200" b="1">
                 <a:solidFill>
@@ -7195,7 +7187,7 @@
             <a:r>
               <a:rPr sz="1700">
                 <a:solidFill>
-                  <a:srgbClr val="C9931A"/>
+                  <a:srgbClr val="8A6410"/>
                 </a:solidFill>
                 <a:latin typeface="Calibri"/>
               </a:rPr>
@@ -7220,7 +7212,7 @@
             <a:r>
               <a:rPr sz="1700">
                 <a:solidFill>
-                  <a:srgbClr val="C9931A"/>
+                  <a:srgbClr val="8A6410"/>
                 </a:solidFill>
                 <a:latin typeface="Calibri"/>
               </a:rPr>
@@ -7245,7 +7237,7 @@
             <a:r>
               <a:rPr sz="1700">
                 <a:solidFill>
-                  <a:srgbClr val="C9931A"/>
+                  <a:srgbClr val="8A6410"/>
                 </a:solidFill>
                 <a:latin typeface="Calibri"/>
               </a:rPr>
@@ -7270,7 +7262,7 @@
             <a:r>
               <a:rPr sz="1700">
                 <a:solidFill>
-                  <a:srgbClr val="C9931A"/>
+                  <a:srgbClr val="8A6410"/>
                 </a:solidFill>
                 <a:latin typeface="Calibri"/>
               </a:rPr>
@@ -7325,26 +7317,25 @@
       <p:grpSpPr/>
       <p:sp>
         <p:nvSpPr>
-          <p:cNvPr id="2" name="TextBox 1" descr="Slide title: The ethical line: influence vs. manipulation"/>
-          <p:cNvSpPr txBox="1"/>
-          <p:nvPr/>
+          <p:cNvPr id="2" name="Title 1" descr="Slide title: The ethical line: influence vs. manipulation"/>
+          <p:cNvSpPr>
+            <a:spLocks noGrp="1"/>
+          </p:cNvSpPr>
+          <p:nvPr>
+            <p:ph type="title"/>
+          </p:nvPr>
         </p:nvSpPr>
         <p:spPr>
           <a:xfrm>
             <a:off x="502920" y="411480"/>
             <a:ext cx="11155680" cy="914400"/>
           </a:xfrm>
-          <a:prstGeom prst="rect">
-            <a:avLst/>
-          </a:prstGeom>
-          <a:noFill/>
-        </p:spPr>
-        <p:txBody>
-          <a:bodyPr wrap="square">
-            <a:spAutoFit/>
-          </a:bodyPr>
-          <a:lstStyle/>
-          <a:p>
+        </p:spPr>
+        <p:txBody>
+          <a:bodyPr wrap="square"/>
+          <a:lstStyle/>
+          <a:p>
+            <a:pPr algn="l"/>
             <a:r>
               <a:rPr sz="3200" b="1">
                 <a:solidFill>
@@ -7490,7 +7481,7 @@
             <a:r>
               <a:rPr sz="1500">
                 <a:solidFill>
-                  <a:srgbClr val="C9931A"/>
+                  <a:srgbClr val="8A6410"/>
                 </a:solidFill>
                 <a:latin typeface="Calibri"/>
               </a:rPr>
@@ -7515,7 +7506,7 @@
             <a:r>
               <a:rPr sz="1500">
                 <a:solidFill>
-                  <a:srgbClr val="C9931A"/>
+                  <a:srgbClr val="8A6410"/>
                 </a:solidFill>
                 <a:latin typeface="Calibri"/>
               </a:rPr>
@@ -7540,7 +7531,7 @@
             <a:r>
               <a:rPr sz="1500">
                 <a:solidFill>
-                  <a:srgbClr val="C9931A"/>
+                  <a:srgbClr val="8A6410"/>
                 </a:solidFill>
                 <a:latin typeface="Calibri"/>
               </a:rPr>
@@ -7622,7 +7613,7 @@
             <a:r>
               <a:rPr sz="1500">
                 <a:solidFill>
-                  <a:srgbClr val="C9931A"/>
+                  <a:srgbClr val="8A6410"/>
                 </a:solidFill>
                 <a:latin typeface="Calibri"/>
               </a:rPr>
@@ -7647,7 +7638,7 @@
             <a:r>
               <a:rPr sz="1500">
                 <a:solidFill>
-                  <a:srgbClr val="C9931A"/>
+                  <a:srgbClr val="8A6410"/>
                 </a:solidFill>
                 <a:latin typeface="Calibri"/>
               </a:rPr>
@@ -7672,7 +7663,7 @@
             <a:r>
               <a:rPr sz="1500">
                 <a:solidFill>
-                  <a:srgbClr val="C9931A"/>
+                  <a:srgbClr val="8A6410"/>
                 </a:solidFill>
                 <a:latin typeface="Calibri"/>
               </a:rPr>
@@ -7718,26 +7709,25 @@
       <p:grpSpPr/>
       <p:sp>
         <p:nvSpPr>
-          <p:cNvPr id="2" name="TextBox 1" descr="Slide title: In this course — and in your inbox"/>
-          <p:cNvSpPr txBox="1"/>
-          <p:nvPr/>
+          <p:cNvPr id="2" name="Title 1" descr="Slide title: In this course — and in your inbox"/>
+          <p:cNvSpPr>
+            <a:spLocks noGrp="1"/>
+          </p:cNvSpPr>
+          <p:nvPr>
+            <p:ph type="title"/>
+          </p:nvPr>
         </p:nvSpPr>
         <p:spPr>
           <a:xfrm>
             <a:off x="502920" y="411480"/>
             <a:ext cx="11155680" cy="914400"/>
           </a:xfrm>
-          <a:prstGeom prst="rect">
-            <a:avLst/>
-          </a:prstGeom>
-          <a:noFill/>
-        </p:spPr>
-        <p:txBody>
-          <a:bodyPr wrap="square">
-            <a:spAutoFit/>
-          </a:bodyPr>
-          <a:lstStyle/>
-          <a:p>
+        </p:spPr>
+        <p:txBody>
+          <a:bodyPr wrap="square"/>
+          <a:lstStyle/>
+          <a:p>
+            <a:pPr algn="l"/>
             <a:r>
               <a:rPr sz="3200" b="1">
                 <a:solidFill>
@@ -7849,7 +7839,7 @@
             <a:r>
               <a:rPr sz="1700">
                 <a:solidFill>
-                  <a:srgbClr val="C9931A"/>
+                  <a:srgbClr val="8A6410"/>
                 </a:solidFill>
                 <a:latin typeface="Calibri"/>
               </a:rPr>
@@ -7883,7 +7873,7 @@
             <a:r>
               <a:rPr sz="1700">
                 <a:solidFill>
-                  <a:srgbClr val="C9931A"/>
+                  <a:srgbClr val="8A6410"/>
                 </a:solidFill>
                 <a:latin typeface="Calibri"/>
               </a:rPr>
@@ -7917,7 +7907,7 @@
             <a:r>
               <a:rPr sz="1700">
                 <a:solidFill>
-                  <a:srgbClr val="C9931A"/>
+                  <a:srgbClr val="8A6410"/>
                 </a:solidFill>
                 <a:latin typeface="Calibri"/>
               </a:rPr>
@@ -7951,7 +7941,7 @@
             <a:r>
               <a:rPr sz="1700">
                 <a:solidFill>
-                  <a:srgbClr val="C9931A"/>
+                  <a:srgbClr val="8A6410"/>
                 </a:solidFill>
                 <a:latin typeface="Calibri"/>
               </a:rPr>
@@ -8006,26 +7996,25 @@
       <p:grpSpPr/>
       <p:sp>
         <p:nvSpPr>
-          <p:cNvPr id="2" name="TextBox 1" descr="Slide title: Key takeaways"/>
-          <p:cNvSpPr txBox="1"/>
-          <p:nvPr/>
+          <p:cNvPr id="2" name="Title 1" descr="Slide title: Key takeaways"/>
+          <p:cNvSpPr>
+            <a:spLocks noGrp="1"/>
+          </p:cNvSpPr>
+          <p:nvPr>
+            <p:ph type="title"/>
+          </p:nvPr>
         </p:nvSpPr>
         <p:spPr>
           <a:xfrm>
             <a:off x="502920" y="411480"/>
             <a:ext cx="11155680" cy="914400"/>
           </a:xfrm>
-          <a:prstGeom prst="rect">
-            <a:avLst/>
-          </a:prstGeom>
-          <a:noFill/>
-        </p:spPr>
-        <p:txBody>
-          <a:bodyPr wrap="square">
-            <a:spAutoFit/>
-          </a:bodyPr>
-          <a:lstStyle/>
-          <a:p>
+        </p:spPr>
+        <p:txBody>
+          <a:bodyPr wrap="square"/>
+          <a:lstStyle/>
+          <a:p>
+            <a:pPr algn="l"/>
             <a:r>
               <a:rPr sz="3200" b="1">
                 <a:solidFill>
@@ -8744,26 +8733,25 @@
       <p:grpSpPr/>
       <p:sp>
         <p:nvSpPr>
-          <p:cNvPr id="2" name="TextBox 1" descr="Slide title: Why people skills decide careers"/>
-          <p:cNvSpPr txBox="1"/>
-          <p:nvPr/>
+          <p:cNvPr id="2" name="Title 1" descr="Slide title: Why people skills decide careers"/>
+          <p:cNvSpPr>
+            <a:spLocks noGrp="1"/>
+          </p:cNvSpPr>
+          <p:nvPr>
+            <p:ph type="title"/>
+          </p:nvPr>
         </p:nvSpPr>
         <p:spPr>
           <a:xfrm>
             <a:off x="502920" y="411480"/>
             <a:ext cx="11155680" cy="914400"/>
           </a:xfrm>
-          <a:prstGeom prst="rect">
-            <a:avLst/>
-          </a:prstGeom>
-          <a:noFill/>
-        </p:spPr>
-        <p:txBody>
-          <a:bodyPr wrap="square">
-            <a:spAutoFit/>
-          </a:bodyPr>
-          <a:lstStyle/>
-          <a:p>
+        </p:spPr>
+        <p:txBody>
+          <a:bodyPr wrap="square"/>
+          <a:lstStyle/>
+          <a:p>
+            <a:pPr algn="l"/>
             <a:r>
               <a:rPr sz="3200" b="1">
                 <a:solidFill>
@@ -8875,7 +8863,7 @@
             <a:r>
               <a:rPr sz="1700">
                 <a:solidFill>
-                  <a:srgbClr val="C9931A"/>
+                  <a:srgbClr val="8A6410"/>
                 </a:solidFill>
                 <a:latin typeface="Calibri"/>
               </a:rPr>
@@ -8909,7 +8897,7 @@
             <a:r>
               <a:rPr sz="1700">
                 <a:solidFill>
-                  <a:srgbClr val="C9931A"/>
+                  <a:srgbClr val="8A6410"/>
                 </a:solidFill>
                 <a:latin typeface="Calibri"/>
               </a:rPr>
@@ -8943,7 +8931,7 @@
             <a:r>
               <a:rPr sz="1700">
                 <a:solidFill>
-                  <a:srgbClr val="C9931A"/>
+                  <a:srgbClr val="8A6410"/>
                 </a:solidFill>
                 <a:latin typeface="Calibri"/>
               </a:rPr>
@@ -8977,7 +8965,7 @@
             <a:r>
               <a:rPr sz="1700">
                 <a:solidFill>
-                  <a:srgbClr val="C9931A"/>
+                  <a:srgbClr val="8A6410"/>
                 </a:solidFill>
                 <a:latin typeface="Calibri"/>
               </a:rPr>
@@ -9032,26 +9020,25 @@
       <p:grpSpPr/>
       <p:sp>
         <p:nvSpPr>
-          <p:cNvPr id="2" name="TextBox 1" descr="Slide title: Discussion questions"/>
-          <p:cNvSpPr txBox="1"/>
-          <p:nvPr/>
+          <p:cNvPr id="2" name="Title 1" descr="Slide title: Discussion questions"/>
+          <p:cNvSpPr>
+            <a:spLocks noGrp="1"/>
+          </p:cNvSpPr>
+          <p:nvPr>
+            <p:ph type="title"/>
+          </p:nvPr>
         </p:nvSpPr>
         <p:spPr>
           <a:xfrm>
             <a:off x="502920" y="411480"/>
             <a:ext cx="11155680" cy="914400"/>
           </a:xfrm>
-          <a:prstGeom prst="rect">
-            <a:avLst/>
-          </a:prstGeom>
-          <a:noFill/>
-        </p:spPr>
-        <p:txBody>
-          <a:bodyPr wrap="square">
-            <a:spAutoFit/>
-          </a:bodyPr>
-          <a:lstStyle/>
-          <a:p>
+        </p:spPr>
+        <p:txBody>
+          <a:bodyPr wrap="square"/>
+          <a:lstStyle/>
+          <a:p>
+            <a:pPr algn="l"/>
             <a:r>
               <a:rPr sz="3400" b="1">
                 <a:solidFill>
@@ -9274,26 +9261,25 @@
       <p:grpSpPr/>
       <p:sp>
         <p:nvSpPr>
-          <p:cNvPr id="2" name="TextBox 1" descr="Slide title: A classic worth knowing"/>
-          <p:cNvSpPr txBox="1"/>
-          <p:nvPr/>
+          <p:cNvPr id="2" name="Title 1" descr="Slide title: A classic worth knowing"/>
+          <p:cNvSpPr>
+            <a:spLocks noGrp="1"/>
+          </p:cNvSpPr>
+          <p:nvPr>
+            <p:ph type="title"/>
+          </p:nvPr>
         </p:nvSpPr>
         <p:spPr>
           <a:xfrm>
             <a:off x="502920" y="411480"/>
             <a:ext cx="11155680" cy="914400"/>
           </a:xfrm>
-          <a:prstGeom prst="rect">
-            <a:avLst/>
-          </a:prstGeom>
-          <a:noFill/>
-        </p:spPr>
-        <p:txBody>
-          <a:bodyPr wrap="square">
-            <a:spAutoFit/>
-          </a:bodyPr>
-          <a:lstStyle/>
-          <a:p>
+        </p:spPr>
+        <p:txBody>
+          <a:bodyPr wrap="square"/>
+          <a:lstStyle/>
+          <a:p>
+            <a:pPr algn="l"/>
             <a:r>
               <a:rPr sz="3400" b="1">
                 <a:solidFill>
@@ -9481,7 +9467,40 @@
       <p:grpSpPr/>
       <p:sp>
         <p:nvSpPr>
-          <p:cNvPr id="2" name="TextBox 1" descr="Section number 01"/>
+          <p:cNvPr id="2" name="Title 1" descr="Slide title: Handling people without bruising them"/>
+          <p:cNvSpPr>
+            <a:spLocks noGrp="1"/>
+          </p:cNvSpPr>
+          <p:nvPr>
+            <p:ph type="title"/>
+          </p:nvPr>
+        </p:nvSpPr>
+        <p:spPr>
+          <a:xfrm>
+            <a:off x="822960" y="2834640"/>
+            <a:ext cx="10515600" cy="914400"/>
+          </a:xfrm>
+        </p:spPr>
+        <p:txBody>
+          <a:bodyPr wrap="square"/>
+          <a:lstStyle/>
+          <a:p>
+            <a:pPr algn="l"/>
+            <a:r>
+              <a:rPr sz="4000" b="1">
+                <a:solidFill>
+                  <a:srgbClr val="FFFFFF"/>
+                </a:solidFill>
+                <a:latin typeface="Cambria"/>
+              </a:rPr>
+              <a:t>Handling people without bruising them</a:t>
+            </a:r>
+          </a:p>
+        </p:txBody>
+      </p:sp>
+      <p:sp>
+        <p:nvSpPr>
+          <p:cNvPr id="3" name="TextBox 2" descr="Section number 01"/>
           <p:cNvSpPr txBox="1"/>
           <p:nvPr/>
         </p:nvSpPr>
@@ -9514,40 +9533,6 @@
                 <a:latin typeface="Cambria"/>
               </a:rPr>
               <a:t>01</a:t>
-            </a:r>
-          </a:p>
-        </p:txBody>
-      </p:sp>
-      <p:sp>
-        <p:nvSpPr>
-          <p:cNvPr id="3" name="TextBox 2" descr="Slide title: Handling people without bruising them"/>
-          <p:cNvSpPr txBox="1"/>
-          <p:nvPr/>
-        </p:nvSpPr>
-        <p:spPr>
-          <a:xfrm>
-            <a:off x="822960" y="2834640"/>
-            <a:ext cx="10515600" cy="914400"/>
-          </a:xfrm>
-          <a:prstGeom prst="rect">
-            <a:avLst/>
-          </a:prstGeom>
-          <a:noFill/>
-        </p:spPr>
-        <p:txBody>
-          <a:bodyPr wrap="square">
-            <a:spAutoFit/>
-          </a:bodyPr>
-          <a:lstStyle/>
-          <a:p>
-            <a:r>
-              <a:rPr sz="4000" b="1">
-                <a:solidFill>
-                  <a:srgbClr val="FFFFFF"/>
-                </a:solidFill>
-                <a:latin typeface="Cambria"/>
-              </a:rPr>
-              <a:t>Handling people without bruising them</a:t>
             </a:r>
           </a:p>
         </p:txBody>
@@ -9688,26 +9673,25 @@
       <p:grpSpPr/>
       <p:sp>
         <p:nvSpPr>
-          <p:cNvPr id="2" name="TextBox 1" descr="Slide title: Criticism feels productive — and almost never is"/>
-          <p:cNvSpPr txBox="1"/>
-          <p:nvPr/>
+          <p:cNvPr id="2" name="Title 1" descr="Slide title: Criticism feels productive — and almost never is"/>
+          <p:cNvSpPr>
+            <a:spLocks noGrp="1"/>
+          </p:cNvSpPr>
+          <p:nvPr>
+            <p:ph type="title"/>
+          </p:nvPr>
         </p:nvSpPr>
         <p:spPr>
           <a:xfrm>
             <a:off x="502920" y="411480"/>
             <a:ext cx="11155680" cy="914400"/>
           </a:xfrm>
-          <a:prstGeom prst="rect">
-            <a:avLst/>
-          </a:prstGeom>
-          <a:noFill/>
-        </p:spPr>
-        <p:txBody>
-          <a:bodyPr wrap="square">
-            <a:spAutoFit/>
-          </a:bodyPr>
-          <a:lstStyle/>
-          <a:p>
+        </p:spPr>
+        <p:txBody>
+          <a:bodyPr wrap="square"/>
+          <a:lstStyle/>
+          <a:p>
+            <a:pPr algn="l"/>
             <a:r>
               <a:rPr sz="3200" b="1">
                 <a:solidFill>
@@ -9853,7 +9837,7 @@
             <a:r>
               <a:rPr sz="1500">
                 <a:solidFill>
-                  <a:srgbClr val="C9931A"/>
+                  <a:srgbClr val="8A6410"/>
                 </a:solidFill>
                 <a:latin typeface="Calibri"/>
               </a:rPr>
@@ -9878,7 +9862,7 @@
             <a:r>
               <a:rPr sz="1500">
                 <a:solidFill>
-                  <a:srgbClr val="C9931A"/>
+                  <a:srgbClr val="8A6410"/>
                 </a:solidFill>
                 <a:latin typeface="Calibri"/>
               </a:rPr>
@@ -9903,7 +9887,7 @@
             <a:r>
               <a:rPr sz="1500">
                 <a:solidFill>
-                  <a:srgbClr val="C9931A"/>
+                  <a:srgbClr val="8A6410"/>
                 </a:solidFill>
                 <a:latin typeface="Calibri"/>
               </a:rPr>
@@ -9928,7 +9912,7 @@
             <a:r>
               <a:rPr sz="1500">
                 <a:solidFill>
-                  <a:srgbClr val="C9931A"/>
+                  <a:srgbClr val="8A6410"/>
                 </a:solidFill>
                 <a:latin typeface="Calibri"/>
               </a:rPr>
@@ -10010,7 +9994,7 @@
             <a:r>
               <a:rPr sz="1500">
                 <a:solidFill>
-                  <a:srgbClr val="C9931A"/>
+                  <a:srgbClr val="8A6410"/>
                 </a:solidFill>
                 <a:latin typeface="Calibri"/>
               </a:rPr>
@@ -10044,7 +10028,7 @@
             <a:r>
               <a:rPr sz="1500">
                 <a:solidFill>
-                  <a:srgbClr val="C9931A"/>
+                  <a:srgbClr val="8A6410"/>
                 </a:solidFill>
                 <a:latin typeface="Calibri"/>
               </a:rPr>
@@ -10078,7 +10062,7 @@
             <a:r>
               <a:rPr sz="1500">
                 <a:solidFill>
-                  <a:srgbClr val="C9931A"/>
+                  <a:srgbClr val="8A6410"/>
                 </a:solidFill>
                 <a:latin typeface="Calibri"/>
               </a:rPr>
@@ -10133,26 +10117,25 @@
       <p:grpSpPr/>
       <p:sp>
         <p:nvSpPr>
-          <p:cNvPr id="2" name="TextBox 1" descr="Slide title: Appreciation vs. flattery — only one builds influence"/>
-          <p:cNvSpPr txBox="1"/>
-          <p:nvPr/>
+          <p:cNvPr id="2" name="Title 1" descr="Slide title: Appreciation vs. flattery — only one builds influence"/>
+          <p:cNvSpPr>
+            <a:spLocks noGrp="1"/>
+          </p:cNvSpPr>
+          <p:nvPr>
+            <p:ph type="title"/>
+          </p:nvPr>
         </p:nvSpPr>
         <p:spPr>
           <a:xfrm>
             <a:off x="502920" y="411480"/>
             <a:ext cx="11155680" cy="914400"/>
           </a:xfrm>
-          <a:prstGeom prst="rect">
-            <a:avLst/>
-          </a:prstGeom>
-          <a:noFill/>
-        </p:spPr>
-        <p:txBody>
-          <a:bodyPr wrap="square">
-            <a:spAutoFit/>
-          </a:bodyPr>
-          <a:lstStyle/>
-          <a:p>
+        </p:spPr>
+        <p:txBody>
+          <a:bodyPr wrap="square"/>
+          <a:lstStyle/>
+          <a:p>
+            <a:pPr algn="l"/>
             <a:r>
               <a:rPr sz="3200" b="1">
                 <a:solidFill>
@@ -10298,7 +10281,7 @@
             <a:r>
               <a:rPr sz="1500">
                 <a:solidFill>
-                  <a:srgbClr val="C9931A"/>
+                  <a:srgbClr val="8A6410"/>
                 </a:solidFill>
                 <a:latin typeface="Calibri"/>
               </a:rPr>
@@ -10323,7 +10306,7 @@
             <a:r>
               <a:rPr sz="1500">
                 <a:solidFill>
-                  <a:srgbClr val="C9931A"/>
+                  <a:srgbClr val="8A6410"/>
                 </a:solidFill>
                 <a:latin typeface="Calibri"/>
               </a:rPr>
@@ -10348,7 +10331,7 @@
             <a:r>
               <a:rPr sz="1500">
                 <a:solidFill>
-                  <a:srgbClr val="C9931A"/>
+                  <a:srgbClr val="8A6410"/>
                 </a:solidFill>
                 <a:latin typeface="Calibri"/>
               </a:rPr>
@@ -10373,7 +10356,7 @@
             <a:r>
               <a:rPr sz="1500">
                 <a:solidFill>
-                  <a:srgbClr val="C9931A"/>
+                  <a:srgbClr val="8A6410"/>
                 </a:solidFill>
                 <a:latin typeface="Calibri"/>
               </a:rPr>
@@ -10455,7 +10438,7 @@
             <a:r>
               <a:rPr sz="1500">
                 <a:solidFill>
-                  <a:srgbClr val="C9931A"/>
+                  <a:srgbClr val="8A6410"/>
                 </a:solidFill>
                 <a:latin typeface="Calibri"/>
               </a:rPr>
@@ -10480,7 +10463,7 @@
             <a:r>
               <a:rPr sz="1500">
                 <a:solidFill>
-                  <a:srgbClr val="C9931A"/>
+                  <a:srgbClr val="8A6410"/>
                 </a:solidFill>
                 <a:latin typeface="Calibri"/>
               </a:rPr>
@@ -10505,7 +10488,7 @@
             <a:r>
               <a:rPr sz="1500">
                 <a:solidFill>
-                  <a:srgbClr val="C9931A"/>
+                  <a:srgbClr val="8A6410"/>
                 </a:solidFill>
                 <a:latin typeface="Calibri"/>
               </a:rPr>
@@ -10530,7 +10513,7 @@
             <a:r>
               <a:rPr sz="1500">
                 <a:solidFill>
-                  <a:srgbClr val="C9931A"/>
+                  <a:srgbClr val="8A6410"/>
                 </a:solidFill>
                 <a:latin typeface="Calibri"/>
               </a:rPr>
@@ -10576,26 +10559,25 @@
       <p:grpSpPr/>
       <p:sp>
         <p:nvSpPr>
-          <p:cNvPr id="2" name="TextBox 1" descr="Slide title: Frame it in their interests — the master key"/>
-          <p:cNvSpPr txBox="1"/>
-          <p:nvPr/>
+          <p:cNvPr id="2" name="Title 1" descr="Slide title: Frame it in their interests — the master key"/>
+          <p:cNvSpPr>
+            <a:spLocks noGrp="1"/>
+          </p:cNvSpPr>
+          <p:nvPr>
+            <p:ph type="title"/>
+          </p:nvPr>
         </p:nvSpPr>
         <p:spPr>
           <a:xfrm>
             <a:off x="502920" y="411480"/>
             <a:ext cx="11155680" cy="914400"/>
           </a:xfrm>
-          <a:prstGeom prst="rect">
-            <a:avLst/>
-          </a:prstGeom>
-          <a:noFill/>
-        </p:spPr>
-        <p:txBody>
-          <a:bodyPr wrap="square">
-            <a:spAutoFit/>
-          </a:bodyPr>
-          <a:lstStyle/>
-          <a:p>
+        </p:spPr>
+        <p:txBody>
+          <a:bodyPr wrap="square"/>
+          <a:lstStyle/>
+          <a:p>
+            <a:pPr algn="l"/>
             <a:r>
               <a:rPr sz="3200" b="1">
                 <a:solidFill>
@@ -10707,7 +10689,7 @@
             <a:r>
               <a:rPr sz="1700">
                 <a:solidFill>
-                  <a:srgbClr val="C9931A"/>
+                  <a:srgbClr val="8A6410"/>
                 </a:solidFill>
                 <a:latin typeface="Calibri"/>
               </a:rPr>
@@ -10741,7 +10723,7 @@
             <a:r>
               <a:rPr sz="1700">
                 <a:solidFill>
-                  <a:srgbClr val="C9931A"/>
+                  <a:srgbClr val="8A6410"/>
                 </a:solidFill>
                 <a:latin typeface="Calibri"/>
               </a:rPr>
@@ -10775,7 +10757,7 @@
             <a:r>
               <a:rPr sz="1700">
                 <a:solidFill>
-                  <a:srgbClr val="C9931A"/>
+                  <a:srgbClr val="8A6410"/>
                 </a:solidFill>
                 <a:latin typeface="Calibri"/>
               </a:rPr>
@@ -10809,7 +10791,7 @@
             <a:r>
               <a:rPr sz="1700">
                 <a:solidFill>
-                  <a:srgbClr val="C9931A"/>
+                  <a:srgbClr val="8A6410"/>
                 </a:solidFill>
                 <a:latin typeface="Calibri"/>
               </a:rPr>
@@ -10843,7 +10825,7 @@
             <a:r>
               <a:rPr sz="1700">
                 <a:solidFill>
-                  <a:srgbClr val="C9931A"/>
+                  <a:srgbClr val="8A6410"/>
                 </a:solidFill>
                 <a:latin typeface="Calibri"/>
               </a:rPr>
@@ -10898,7 +10880,40 @@
       <p:grpSpPr/>
       <p:sp>
         <p:nvSpPr>
-          <p:cNvPr id="2" name="TextBox 1" descr="Section number 02"/>
+          <p:cNvPr id="2" name="Title 1" descr="Slide title: Becoming someone people say yes to"/>
+          <p:cNvSpPr>
+            <a:spLocks noGrp="1"/>
+          </p:cNvSpPr>
+          <p:nvPr>
+            <p:ph type="title"/>
+          </p:nvPr>
+        </p:nvSpPr>
+        <p:spPr>
+          <a:xfrm>
+            <a:off x="822960" y="2834640"/>
+            <a:ext cx="10515600" cy="914400"/>
+          </a:xfrm>
+        </p:spPr>
+        <p:txBody>
+          <a:bodyPr wrap="square"/>
+          <a:lstStyle/>
+          <a:p>
+            <a:pPr algn="l"/>
+            <a:r>
+              <a:rPr sz="4000" b="1">
+                <a:solidFill>
+                  <a:srgbClr val="FFFFFF"/>
+                </a:solidFill>
+                <a:latin typeface="Cambria"/>
+              </a:rPr>
+              <a:t>Becoming someone people say yes to</a:t>
+            </a:r>
+          </a:p>
+        </p:txBody>
+      </p:sp>
+      <p:sp>
+        <p:nvSpPr>
+          <p:cNvPr id="3" name="TextBox 2" descr="Section number 02"/>
           <p:cNvSpPr txBox="1"/>
           <p:nvPr/>
         </p:nvSpPr>
@@ -10931,40 +10946,6 @@
                 <a:latin typeface="Cambria"/>
               </a:rPr>
               <a:t>02</a:t>
-            </a:r>
-          </a:p>
-        </p:txBody>
-      </p:sp>
-      <p:sp>
-        <p:nvSpPr>
-          <p:cNvPr id="3" name="TextBox 2" descr="Slide title: Becoming someone people say yes to"/>
-          <p:cNvSpPr txBox="1"/>
-          <p:nvPr/>
-        </p:nvSpPr>
-        <p:spPr>
-          <a:xfrm>
-            <a:off x="822960" y="2834640"/>
-            <a:ext cx="10515600" cy="914400"/>
-          </a:xfrm>
-          <a:prstGeom prst="rect">
-            <a:avLst/>
-          </a:prstGeom>
-          <a:noFill/>
-        </p:spPr>
-        <p:txBody>
-          <a:bodyPr wrap="square">
-            <a:spAutoFit/>
-          </a:bodyPr>
-          <a:lstStyle/>
-          <a:p>
-            <a:r>
-              <a:rPr sz="4000" b="1">
-                <a:solidFill>
-                  <a:srgbClr val="FFFFFF"/>
-                </a:solidFill>
-                <a:latin typeface="Cambria"/>
-              </a:rPr>
-              <a:t>Becoming someone people say yes to</a:t>
             </a:r>
           </a:p>
         </p:txBody>
@@ -11105,26 +11086,25 @@
       <p:grpSpPr/>
       <p:sp>
         <p:nvSpPr>
-          <p:cNvPr id="2" name="TextBox 1" descr="Slide title: The small habits that make people like working with you"/>
-          <p:cNvSpPr txBox="1"/>
-          <p:nvPr/>
+          <p:cNvPr id="2" name="Title 1" descr="Slide title: The small habits that make people like working with you"/>
+          <p:cNvSpPr>
+            <a:spLocks noGrp="1"/>
+          </p:cNvSpPr>
+          <p:nvPr>
+            <p:ph type="title"/>
+          </p:nvPr>
         </p:nvSpPr>
         <p:spPr>
           <a:xfrm>
             <a:off x="502920" y="411480"/>
             <a:ext cx="11155680" cy="914400"/>
           </a:xfrm>
-          <a:prstGeom prst="rect">
-            <a:avLst/>
-          </a:prstGeom>
-          <a:noFill/>
-        </p:spPr>
-        <p:txBody>
-          <a:bodyPr wrap="square">
-            <a:spAutoFit/>
-          </a:bodyPr>
-          <a:lstStyle/>
-          <a:p>
+        </p:spPr>
+        <p:txBody>
+          <a:bodyPr wrap="square"/>
+          <a:lstStyle/>
+          <a:p>
+            <a:pPr algn="l"/>
             <a:r>
               <a:rPr sz="3200" b="1">
                 <a:solidFill>
